--- a/decks/maths-algebra/maths-algebra_ch6_substitution-two-step.pptx
+++ b/decks/maths-algebra/maths-algebra_ch6_substitution-two-step.pptx
@@ -121,47 +121,47 @@
   <p:extLst>
     <p:ext uri="{521415D9-36F7-43E2-AB2F-B90AF26B5E84}">
       <p14:sectionLst xmlns:p14="http://schemas.microsoft.com/office/powerpoint/2010/main">
-        <p14:section name="Opening" id="{fd2dff05-3733-3d00-46c5-71f2f77ff934}">
+        <p14:section name="Opening" id="{29144ec1-0407-a096-3ab2-d6b68ebf4856}">
           <p14:sldIdLst>
             <p14:sldId id="256"/>
           </p14:sldIdLst>
         </p14:section>
-        <p14:section name="Gate" id="{30f81ca2-7bb8-6509-11f5-f7f991fc5247}">
+        <p14:section name="Gate" id="{02f929ac-7e68-4497-079c-90a6daaa06e6}">
           <p14:sldIdLst>
             <p14:sldId id="257"/>
             <p14:sldId id="258"/>
           </p14:sldIdLst>
         </p14:section>
-        <p14:section name="Pre-teach" id="{250c9255-1142-d60e-93f9-a6bf7b00c449}">
+        <p14:section name="Pre-teach" id="{c0fe9490-8d50-6ba3-f799-09c4a3f7bb9b}">
           <p14:sldIdLst>
             <p14:sldId id="259"/>
           </p14:sldIdLst>
         </p14:section>
-        <p14:section name="Read-along" id="{2288a5bd-e303-93ef-e096-c5c9aba345f3}">
+        <p14:section name="Read-along" id="{d5e0d984-c490-fa08-b772-107ff2baef7a}">
           <p14:sldIdLst>
             <p14:sldId id="260"/>
             <p14:sldId id="261"/>
           </p14:sldIdLst>
         </p14:section>
-        <p14:section name="Teach" id="{5f2a54b5-35a5-3cd5-5f36-e739f63f48b8}">
+        <p14:section name="Teach" id="{c4036206-9bfe-a02c-7379-9270cb9c5c34}">
           <p14:sldIdLst>
             <p14:sldId id="262"/>
             <p14:sldId id="263"/>
             <p14:sldId id="264"/>
           </p14:sldIdLst>
         </p14:section>
-        <p14:section name="Routes" id="{7ab39d2c-9a93-adf8-5980-b94545e16772}">
+        <p14:section name="Routes" id="{09377191-20b2-911c-07c3-1ef670ef901b}">
           <p14:sldIdLst>
             <p14:sldId id="265"/>
             <p14:sldId id="266"/>
           </p14:sldIdLst>
         </p14:section>
-        <p14:section name="Close" id="{2762fcb9-73d2-4881-c2c7-0cdbcb86164e}">
+        <p14:section name="Close" id="{e5c90fbe-b0ed-88b3-c611-b7a078183538}">
           <p14:sldIdLst>
             <p14:sldId id="267"/>
           </p14:sldIdLst>
         </p14:section>
-        <p14:section name="Answers" id="{67cda5cb-84de-3b6e-abc0-5f9b44501f10}">
+        <p14:section name="Answers" id="{bf5d3f5e-7dc6-22bd-a6cd-e47092b6bd82}">
           <p14:sldIdLst>
             <p14:sldId id="268"/>
             <p14:sldId id="269"/>
@@ -1218,7 +1218,7 @@
               <a:rPr lang="en-US" dirty="0"/>
               <a:t>Do now — retrieval. Silent, no notes, no help: recall comes before any support. Give about four minutes.
 1. Work out 6n − 5 when n = 7.  →  37
-2. Work out 3(k + 5) when k = 6.  →  B   33
+2. Work out 3(k + 5) when k = 6.  →  A   33
 3. Work out 5a² when a = 3.  →  45
 Circulate: who gets 3/3 (Stretch route), 2/3 (Core), 0–1 (Support)? Use this to route pupils later in the lesson.</a:t>
             </a:r>
@@ -1310,7 +1310,7 @@
               <a:rPr lang="en-US" dirty="0"/>
               <a:t>Answers — pupils mark their own in a different colour, then hands up for 3/3, 2/3, 1/3.
 1. 37. 6 × 7 = 42, then 42 − 5 = 37.
-2. B   33. Brackets first: 6 + 5 = 11. Then 3 × 11 = 33.
+2. A   33. Brackets first: 6 + 5 = 11. Then 3 × 11 = 33.
 3. 45. Square first: 3² = 9. Then 5 × 9 = 45.
 Say the route each score points to: 3/3 Stretch, 2/3 Core, 0–1 Support. Pupils may choose to move up.</a:t>
             </a:r>
@@ -8158,7 +8158,7 @@
                 <a:ea typeface="Calibri" pitchFamily="34" charset="-122"/>
                 <a:cs typeface="Calibri" pitchFamily="34" charset="-120"/>
               </a:rPr>
-              <a:t>23</a:t>
+              <a:t>33</a:t>
             </a:r>
             <a:endParaRPr lang="en-US" sz="2400" dirty="0"/>
           </a:p>
@@ -8195,7 +8195,7 @@
                 <a:ea typeface="Calibri" pitchFamily="34" charset="-122"/>
                 <a:cs typeface="Calibri" pitchFamily="34" charset="-120"/>
               </a:rPr>
-              <a:t>33</a:t>
+              <a:t>90</a:t>
             </a:r>
             <a:endParaRPr lang="en-US" sz="2400" dirty="0"/>
           </a:p>
@@ -8232,7 +8232,7 @@
                 <a:ea typeface="Calibri" pitchFamily="34" charset="-122"/>
                 <a:cs typeface="Calibri" pitchFamily="34" charset="-120"/>
               </a:rPr>
-              <a:t>18</a:t>
+              <a:t>23</a:t>
             </a:r>
             <a:endParaRPr lang="en-US" sz="2400" dirty="0"/>
           </a:p>
@@ -8269,7 +8269,7 @@
                 <a:ea typeface="Calibri" pitchFamily="34" charset="-122"/>
                 <a:cs typeface="Calibri" pitchFamily="34" charset="-120"/>
               </a:rPr>
-              <a:t>90</a:t>
+              <a:t>18</a:t>
             </a:r>
             <a:endParaRPr lang="en-US" sz="2400" dirty="0"/>
           </a:p>
@@ -9118,7 +9118,7 @@
                 <a:ea typeface="Calibri" pitchFamily="34" charset="-122"/>
                 <a:cs typeface="Calibri" pitchFamily="34" charset="-120"/>
               </a:rPr>
-              <a:t>B   33</a:t>
+              <a:t>A   33</a:t>
             </a:r>
             <a:endParaRPr lang="en-US" sz="2200" dirty="0"/>
           </a:p>

--- a/decks/maths-algebra/maths-algebra_ch6_substitution-two-step.pptx
+++ b/decks/maths-algebra/maths-algebra_ch6_substitution-two-step.pptx
@@ -121,47 +121,47 @@
   <p:extLst>
     <p:ext uri="{521415D9-36F7-43E2-AB2F-B90AF26B5E84}">
       <p14:sectionLst xmlns:p14="http://schemas.microsoft.com/office/powerpoint/2010/main">
-        <p14:section name="Opening" id="{29144ec1-0407-a096-3ab2-d6b68ebf4856}">
+        <p14:section name="Opening" id="{24b21eb0-d007-84ab-ea9a-8fab31809555}">
           <p14:sldIdLst>
             <p14:sldId id="256"/>
           </p14:sldIdLst>
         </p14:section>
-        <p14:section name="Gate" id="{02f929ac-7e68-4497-079c-90a6daaa06e6}">
+        <p14:section name="Gate" id="{688c6ad8-8521-f5d2-e511-f4d57055b8ed}">
           <p14:sldIdLst>
             <p14:sldId id="257"/>
             <p14:sldId id="258"/>
           </p14:sldIdLst>
         </p14:section>
-        <p14:section name="Pre-teach" id="{c0fe9490-8d50-6ba3-f799-09c4a3f7bb9b}">
+        <p14:section name="Pre-teach" id="{76e898db-b5e0-079b-a013-5e56621bd7a8}">
           <p14:sldIdLst>
             <p14:sldId id="259"/>
           </p14:sldIdLst>
         </p14:section>
-        <p14:section name="Read-along" id="{d5e0d984-c490-fa08-b772-107ff2baef7a}">
+        <p14:section name="Read-along" id="{7b867489-bd75-bd10-abf9-fd6aa08d48b3}">
           <p14:sldIdLst>
             <p14:sldId id="260"/>
             <p14:sldId id="261"/>
           </p14:sldIdLst>
         </p14:section>
-        <p14:section name="Teach" id="{c4036206-9bfe-a02c-7379-9270cb9c5c34}">
+        <p14:section name="Teach" id="{218ae0aa-3fb5-5904-d2cc-056987fce917}">
           <p14:sldIdLst>
             <p14:sldId id="262"/>
             <p14:sldId id="263"/>
             <p14:sldId id="264"/>
           </p14:sldIdLst>
         </p14:section>
-        <p14:section name="Routes" id="{09377191-20b2-911c-07c3-1ef670ef901b}">
+        <p14:section name="Routes" id="{711804d8-45cb-ebfc-5b0c-4d3e373964af}">
           <p14:sldIdLst>
             <p14:sldId id="265"/>
             <p14:sldId id="266"/>
           </p14:sldIdLst>
         </p14:section>
-        <p14:section name="Close" id="{e5c90fbe-b0ed-88b3-c611-b7a078183538}">
+        <p14:section name="Close" id="{d11ce860-1716-3adb-a482-b838107857fb}">
           <p14:sldIdLst>
             <p14:sldId id="267"/>
           </p14:sldIdLst>
         </p14:section>
-        <p14:section name="Answers" id="{bf5d3f5e-7dc6-22bd-a6cd-e47092b6bd82}">
+        <p14:section name="Answers" id="{3fe40bcf-4bb5-74f3-b3a5-ce6ced5981b9}">
           <p14:sldIdLst>
             <p14:sldId id="268"/>
             <p14:sldId id="269"/>
